--- a/tests/benchmark/architectural_slides/case_008_overlay_hero/output.pptx
+++ b/tests/benchmark/architectural_slides/case_008_overlay_hero/output.pptx
@@ -909,8 +909,8 @@
         </p:nvSpPr>
         <p:spPr>
           <a:xfrm>
-            <a:off x="640080" y="1028700"/>
-            <a:ext cx="7863840" cy="3307080"/>
+            <a:off x="640080" y="1126998"/>
+            <a:ext cx="7863840" cy="3208782"/>
           </a:xfrm>
           <a:prstGeom prst="rect">
             <a:avLst/>
@@ -934,7 +934,7 @@
         </p:nvSpPr>
         <p:spPr>
           <a:xfrm>
-            <a:off x="777240" y="2499360"/>
+            <a:off x="777240" y="2548509"/>
             <a:ext cx="7589520" cy="365760"/>
           </a:xfrm>
           <a:prstGeom prst="rect">
@@ -974,7 +974,7 @@
         <p:spPr>
           <a:xfrm>
             <a:off x="640080" y="411480"/>
-            <a:ext cx="7863840" cy="502920"/>
+            <a:ext cx="7863840" cy="601218"/>
           </a:xfrm>
           <a:prstGeom prst="rect">
             <a:avLst/>
@@ -1051,8 +1051,8 @@
         </p:nvSpPr>
         <p:spPr>
           <a:xfrm>
-            <a:off x="792480" y="2847594"/>
-            <a:ext cx="3538728" cy="1157478"/>
+            <a:off x="792480" y="2891828"/>
+            <a:ext cx="3538728" cy="1123074"/>
           </a:xfrm>
           <a:prstGeom prst="rect">
             <a:avLst/>

--- a/tests/benchmark/architectural_slides/case_008_overlay_hero/output.pptx
+++ b/tests/benchmark/architectural_slides/case_008_overlay_hero/output.pptx
@@ -901,12 +901,19 @@
           <a:chExt cx="0" cy="0"/>
         </a:xfrm>
       </p:grpSpPr>
-      <p:sp>
-        <p:nvSpPr>
-          <p:cNvPr id="2" name="Shape 0"/>
-          <p:cNvSpPr/>
+      <p:pic>
+        <p:nvPicPr>
+          <p:cNvPr id="2" name="Image 0" descr="C:\Users\navib\Desktop\development\Archium-Agent\tests\benchmark\architectural_slides\case_008_overlay_hero\assets\c0080001-0001-4001-8001-000000000001.png">    </p:cNvPr>
+          <p:cNvPicPr>
+            <a:picLocks noChangeAspect="1"/>
+          </p:cNvPicPr>
           <p:nvPr/>
-        </p:nvSpPr>
+        </p:nvPicPr>
+        <p:blipFill>
+          <a:blip r:embed="rId1"/>
+          <a:srcRect l="0" r="0" t="0" b="0"/>
+          <a:stretch/>
+        </p:blipFill>
         <p:spPr>
           <a:xfrm>
             <a:off x="640080" y="1126998"/>
@@ -915,59 +922,11 @@
           <a:prstGeom prst="rect">
             <a:avLst/>
           </a:prstGeom>
-          <a:solidFill>
-            <a:srgbClr val="FFFFFF"/>
-          </a:solidFill>
-          <a:ln w="19050">
-            <a:solidFill>
-              <a:srgbClr val="C47B2B"/>
-            </a:solidFill>
-            <a:prstDash val="dash"/>
-          </a:ln>
         </p:spPr>
-      </p:sp>
+      </p:pic>
       <p:sp>
         <p:nvSpPr>
-          <p:cNvPr id="3" name="Text 1"/>
-          <p:cNvSpPr/>
-          <p:nvPr/>
-        </p:nvSpPr>
-        <p:spPr>
-          <a:xfrm>
-            <a:off x="777240" y="2548509"/>
-            <a:ext cx="7589520" cy="365760"/>
-          </a:xfrm>
-          <a:prstGeom prst="rect">
-            <a:avLst/>
-          </a:prstGeom>
-          <a:noFill/>
-          <a:ln/>
-        </p:spPr>
-        <p:txBody>
-          <a:bodyPr wrap="square" rtlCol="0" anchor="ctr"/>
-          <a:lstStyle/>
-          <a:p>
-            <a:pPr algn="ctr" indent="0" marL="0">
-              <a:buNone/>
-            </a:pPr>
-            <a:r>
-              <a:rPr lang="en-US" sz="1200" dirty="0">
-                <a:solidFill>
-                  <a:srgbClr val="777777"/>
-                </a:solidFill>
-                <a:latin typeface="Microsoft YaHei" pitchFamily="34" charset="0"/>
-                <a:ea typeface="Microsoft YaHei" pitchFamily="34" charset="-122"/>
-                <a:cs typeface="Microsoft YaHei" pitchFamily="34" charset="-120"/>
-              </a:rPr>
-              <a:t>素材缺失/路径未解析</a:t>
-            </a:r>
-            <a:endParaRPr lang="en-US" sz="1200" dirty="0"/>
-          </a:p>
-        </p:txBody>
-      </p:sp>
-      <p:sp>
-        <p:nvSpPr>
-          <p:cNvPr id="4" name="Text 2"/>
+          <p:cNvPr id="3" name="Text 0"/>
           <p:cNvSpPr/>
           <p:nvPr/>
         </p:nvSpPr>
@@ -1006,7 +965,7 @@
       </p:sp>
       <p:sp>
         <p:nvSpPr>
-          <p:cNvPr id="5" name="Text 3"/>
+          <p:cNvPr id="4" name="Text 1"/>
           <p:cNvSpPr/>
           <p:nvPr/>
         </p:nvSpPr>
@@ -1045,7 +1004,7 @@
       </p:sp>
       <p:sp>
         <p:nvSpPr>
-          <p:cNvPr id="6" name="Text 4"/>
+          <p:cNvPr id="5" name="Text 2"/>
           <p:cNvSpPr/>
           <p:nvPr/>
         </p:nvSpPr>

--- a/tests/benchmark/architectural_slides/case_008_overlay_hero/output.pptx
+++ b/tests/benchmark/architectural_slides/case_008_overlay_hero/output.pptx
@@ -916,8 +916,8 @@
         </p:blipFill>
         <p:spPr>
           <a:xfrm>
-            <a:off x="640080" y="1126998"/>
-            <a:ext cx="7863840" cy="3208782"/>
+            <a:off x="640080" y="1147572"/>
+            <a:ext cx="7863840" cy="3188208"/>
           </a:xfrm>
           <a:prstGeom prst="rect">
             <a:avLst/>
@@ -933,7 +933,7 @@
         <p:spPr>
           <a:xfrm>
             <a:off x="640080" y="411480"/>
-            <a:ext cx="7863840" cy="601218"/>
+            <a:ext cx="7863840" cy="621792"/>
           </a:xfrm>
           <a:prstGeom prst="rect">
             <a:avLst/>
@@ -971,8 +971,8 @@
         </p:nvSpPr>
         <p:spPr>
           <a:xfrm>
-            <a:off x="640080" y="4503420"/>
-            <a:ext cx="5504688" cy="228600"/>
+            <a:off x="640080" y="4519994"/>
+            <a:ext cx="5504688" cy="212027"/>
           </a:xfrm>
           <a:prstGeom prst="rect">
             <a:avLst/>
@@ -1010,8 +1010,8 @@
         </p:nvSpPr>
         <p:spPr>
           <a:xfrm>
-            <a:off x="792480" y="2891828"/>
-            <a:ext cx="3538728" cy="1123074"/>
+            <a:off x="792480" y="2901086"/>
+            <a:ext cx="3538728" cy="1115873"/>
           </a:xfrm>
           <a:prstGeom prst="rect">
             <a:avLst/>

--- a/tests/benchmark/architectural_slides/case_008_overlay_hero/output.pptx
+++ b/tests/benchmark/architectural_slides/case_008_overlay_hero/output.pptx
@@ -916,8 +916,8 @@
         </p:blipFill>
         <p:spPr>
           <a:xfrm>
-            <a:off x="640080" y="1147572"/>
-            <a:ext cx="7863840" cy="3188208"/>
+            <a:off x="640080" y="1126998"/>
+            <a:ext cx="7863840" cy="3208782"/>
           </a:xfrm>
           <a:prstGeom prst="rect">
             <a:avLst/>
@@ -933,7 +933,7 @@
         <p:spPr>
           <a:xfrm>
             <a:off x="640080" y="411480"/>
-            <a:ext cx="7863840" cy="621792"/>
+            <a:ext cx="7863840" cy="601218"/>
           </a:xfrm>
           <a:prstGeom prst="rect">
             <a:avLst/>
@@ -1010,8 +1010,8 @@
         </p:nvSpPr>
         <p:spPr>
           <a:xfrm>
-            <a:off x="792480" y="2901086"/>
-            <a:ext cx="3538728" cy="1115873"/>
+            <a:off x="792480" y="2891828"/>
+            <a:ext cx="3538728" cy="1123074"/>
           </a:xfrm>
           <a:prstGeom prst="rect">
             <a:avLst/>

--- a/tests/benchmark/architectural_slides/case_008_overlay_hero/output.pptx
+++ b/tests/benchmark/architectural_slides/case_008_overlay_hero/output.pptx
@@ -916,8 +916,8 @@
         </p:blipFill>
         <p:spPr>
           <a:xfrm>
-            <a:off x="640080" y="1126998"/>
-            <a:ext cx="7863840" cy="3208782"/>
+            <a:off x="640080" y="1050798"/>
+            <a:ext cx="7863840" cy="3323082"/>
           </a:xfrm>
           <a:prstGeom prst="rect">
             <a:avLst/>
@@ -1010,8 +1010,8 @@
         </p:nvSpPr>
         <p:spPr>
           <a:xfrm>
-            <a:off x="792480" y="2891828"/>
-            <a:ext cx="3538728" cy="1123074"/>
+            <a:off x="792480" y="2878493"/>
+            <a:ext cx="3538728" cy="1163079"/>
           </a:xfrm>
           <a:prstGeom prst="rect">
             <a:avLst/>
